--- a/仕様書/プレイヤー.pptx
+++ b/仕様書/プレイヤー.pptx
@@ -105,6 +105,11 @@
       </a:defRPr>
     </a:lvl9pPr>
   </p:defaultTextStyle>
+  <p:extLst>
+    <p:ext uri="{EFAFB233-063F-42B5-8137-9DF3F51BA10A}">
+      <p15:sldGuideLst xmlns:p15="http://schemas.microsoft.com/office/powerpoint/2012/main"/>
+    </p:ext>
+  </p:extLst>
 </p:presentation>
 </file>
 
@@ -113,12 +118,12 @@
   <pc:docChgLst>
     <pc:chgData name="黒沢　爽次" userId="fae486ef-0c84-45a4-a237-2d2b758b0e89" providerId="ADAL" clId="{C54E03A6-DA14-437F-B108-34F2BCF5E6C8}"/>
     <pc:docChg chg="undo custSel addSld modSld sldOrd">
-      <pc:chgData name="黒沢　爽次" userId="fae486ef-0c84-45a4-a237-2d2b758b0e89" providerId="ADAL" clId="{C54E03A6-DA14-437F-B108-34F2BCF5E6C8}" dt="2026-06-02T03:14:27.570" v="254" actId="20577"/>
+      <pc:chgData name="黒沢　爽次" userId="fae486ef-0c84-45a4-a237-2d2b758b0e89" providerId="ADAL" clId="{C54E03A6-DA14-437F-B108-34F2BCF5E6C8}" dt="2026-06-04T01:36:53.479" v="322" actId="20577"/>
       <pc:docMkLst>
         <pc:docMk/>
       </pc:docMkLst>
       <pc:sldChg chg="addSp delSp modSp new mod">
-        <pc:chgData name="黒沢　爽次" userId="fae486ef-0c84-45a4-a237-2d2b758b0e89" providerId="ADAL" clId="{C54E03A6-DA14-437F-B108-34F2BCF5E6C8}" dt="2026-06-02T03:14:27.570" v="254" actId="20577"/>
+        <pc:chgData name="黒沢　爽次" userId="fae486ef-0c84-45a4-a237-2d2b758b0e89" providerId="ADAL" clId="{C54E03A6-DA14-437F-B108-34F2BCF5E6C8}" dt="2026-06-04T01:36:53.479" v="322" actId="20577"/>
         <pc:sldMkLst>
           <pc:docMk/>
           <pc:sldMk cId="457859946" sldId="256"/>
@@ -148,7 +153,7 @@
           </ac:spMkLst>
         </pc:spChg>
         <pc:graphicFrameChg chg="add mod modGraphic">
-          <ac:chgData name="黒沢　爽次" userId="fae486ef-0c84-45a4-a237-2d2b758b0e89" providerId="ADAL" clId="{C54E03A6-DA14-437F-B108-34F2BCF5E6C8}" dt="2026-06-02T03:14:27.570" v="254" actId="20577"/>
+          <ac:chgData name="黒沢　爽次" userId="fae486ef-0c84-45a4-a237-2d2b758b0e89" providerId="ADAL" clId="{C54E03A6-DA14-437F-B108-34F2BCF5E6C8}" dt="2026-06-04T01:36:53.479" v="322" actId="20577"/>
           <ac:graphicFrameMkLst>
             <pc:docMk/>
             <pc:sldMk cId="457859946" sldId="256"/>
@@ -157,7 +162,7 @@
         </pc:graphicFrameChg>
       </pc:sldChg>
       <pc:sldChg chg="addSp delSp modSp new mod ord">
-        <pc:chgData name="黒沢　爽次" userId="fae486ef-0c84-45a4-a237-2d2b758b0e89" providerId="ADAL" clId="{C54E03A6-DA14-437F-B108-34F2BCF5E6C8}" dt="2026-06-02T03:09:46.112" v="142" actId="20577"/>
+        <pc:chgData name="黒沢　爽次" userId="fae486ef-0c84-45a4-a237-2d2b758b0e89" providerId="ADAL" clId="{C54E03A6-DA14-437F-B108-34F2BCF5E6C8}" dt="2026-06-04T01:34:34.699" v="264" actId="20577"/>
         <pc:sldMkLst>
           <pc:docMk/>
           <pc:sldMk cId="2943348154" sldId="257"/>
@@ -187,7 +192,7 @@
           </ac:spMkLst>
         </pc:spChg>
         <pc:spChg chg="add mod">
-          <ac:chgData name="黒沢　爽次" userId="fae486ef-0c84-45a4-a237-2d2b758b0e89" providerId="ADAL" clId="{C54E03A6-DA14-437F-B108-34F2BCF5E6C8}" dt="2026-06-02T03:09:46.112" v="142" actId="20577"/>
+          <ac:chgData name="黒沢　爽次" userId="fae486ef-0c84-45a4-a237-2d2b758b0e89" providerId="ADAL" clId="{C54E03A6-DA14-437F-B108-34F2BCF5E6C8}" dt="2026-06-04T01:34:34.699" v="264" actId="20577"/>
           <ac:spMkLst>
             <pc:docMk/>
             <pc:sldMk cId="2943348154" sldId="257"/>
@@ -741,7 +746,7 @@
         <p:spPr>
           <a:xfrm>
             <a:off x="1923803" y="2398816"/>
-            <a:ext cx="1627369" cy="1200329"/>
+            <a:ext cx="1627369" cy="1477328"/>
           </a:xfrm>
           <a:prstGeom prst="rect">
             <a:avLst/>
@@ -761,6 +766,17 @@
             <a:r>
               <a:rPr kumimoji="1" lang="ja-JP" altLang="en-US" dirty="0"/>
               <a:t>移動</a:t>
+            </a:r>
+            <a:endParaRPr kumimoji="1" lang="en-US" altLang="ja-JP" dirty="0"/>
+          </a:p>
+          <a:p>
+            <a:pPr marL="285750" indent="-285750">
+              <a:buFont typeface="Arial" panose="020B0604020202020204" pitchFamily="34" charset="0"/>
+              <a:buChar char="•"/>
+            </a:pPr>
+            <a:r>
+              <a:rPr lang="ja-JP" altLang="en-US" dirty="0"/>
+              <a:t>ジャンプ</a:t>
             </a:r>
             <a:endParaRPr kumimoji="1" lang="en-US" altLang="ja-JP" dirty="0"/>
           </a:p>
@@ -879,7 +895,7 @@
           <p:nvPr>
             <p:extLst>
               <p:ext uri="{D42A27DB-BD31-4B8C-83A1-F6EECF244321}">
-                <p14:modId xmlns:p14="http://schemas.microsoft.com/office/powerpoint/2010/main" val="2433915626"/>
+                <p14:modId xmlns:p14="http://schemas.microsoft.com/office/powerpoint/2010/main" val="279221158"/>
               </p:ext>
             </p:extLst>
           </p:nvPr>
@@ -1063,9 +1079,10 @@
                     <a:lstStyle/>
                     <a:p>
                       <a:r>
-                        <a:rPr kumimoji="1" lang="ja-JP" altLang="en-US" dirty="0"/>
-                        <a:t>スペースキー</a:t>
-                      </a:r>
+                        <a:rPr kumimoji="1" lang="en-US" altLang="ja-JP" dirty="0"/>
+                        <a:t>Z</a:t>
+                      </a:r>
+                      <a:endParaRPr kumimoji="1" lang="ja-JP" altLang="en-US" dirty="0"/>
                     </a:p>
                   </a:txBody>
                   <a:tcPr/>
@@ -1111,7 +1128,7 @@
                     <a:p>
                       <a:r>
                         <a:rPr kumimoji="1" lang="en-US" altLang="ja-JP" dirty="0"/>
-                        <a:t>Z</a:t>
+                        <a:t>X</a:t>
                       </a:r>
                       <a:endParaRPr kumimoji="1" lang="ja-JP" altLang="en-US" dirty="0"/>
                     </a:p>
@@ -1157,16 +1174,10 @@
                     <a:bodyPr/>
                     <a:lstStyle/>
                     <a:p>
-                      <a:endParaRPr kumimoji="1" lang="ja-JP" altLang="en-US"/>
-                    </a:p>
-                  </a:txBody>
-                  <a:tcPr/>
-                </a:tc>
-                <a:tc>
-                  <a:txBody>
-                    <a:bodyPr/>
-                    <a:lstStyle/>
-                    <a:p>
+                      <a:r>
+                        <a:rPr kumimoji="1" lang="en-US" altLang="ja-JP" dirty="0"/>
+                        <a:t>C</a:t>
+                      </a:r>
                       <a:endParaRPr kumimoji="1" lang="ja-JP" altLang="en-US" dirty="0"/>
                     </a:p>
                   </a:txBody>
@@ -1177,7 +1188,24 @@
                     <a:bodyPr/>
                     <a:lstStyle/>
                     <a:p>
-                      <a:endParaRPr kumimoji="1" lang="ja-JP" altLang="en-US"/>
+                      <a:r>
+                        <a:rPr kumimoji="1" lang="en-US" altLang="ja-JP" dirty="0"/>
+                        <a:t>B</a:t>
+                      </a:r>
+                      <a:endParaRPr kumimoji="1" lang="ja-JP" altLang="en-US" dirty="0"/>
+                    </a:p>
+                  </a:txBody>
+                  <a:tcPr/>
+                </a:tc>
+                <a:tc>
+                  <a:txBody>
+                    <a:bodyPr/>
+                    <a:lstStyle/>
+                    <a:p>
+                      <a:r>
+                        <a:rPr kumimoji="1" lang="ja-JP" altLang="en-US" dirty="0"/>
+                        <a:t>スキル</a:t>
+                      </a:r>
                     </a:p>
                   </a:txBody>
                   <a:tcPr/>
@@ -1194,16 +1222,10 @@
                     <a:bodyPr/>
                     <a:lstStyle/>
                     <a:p>
-                      <a:endParaRPr kumimoji="1" lang="ja-JP" altLang="en-US"/>
-                    </a:p>
-                  </a:txBody>
-                  <a:tcPr/>
-                </a:tc>
-                <a:tc>
-                  <a:txBody>
-                    <a:bodyPr/>
-                    <a:lstStyle/>
-                    <a:p>
+                      <a:r>
+                        <a:rPr kumimoji="1" lang="en-US" altLang="ja-JP" dirty="0"/>
+                        <a:t>Q</a:t>
+                      </a:r>
                       <a:endParaRPr kumimoji="1" lang="ja-JP" altLang="en-US" dirty="0"/>
                     </a:p>
                   </a:txBody>
@@ -1214,7 +1236,24 @@
                     <a:bodyPr/>
                     <a:lstStyle/>
                     <a:p>
-                      <a:endParaRPr kumimoji="1" lang="ja-JP" altLang="en-US"/>
+                      <a:r>
+                        <a:rPr kumimoji="1" lang="en-US" altLang="ja-JP" dirty="0"/>
+                        <a:t>X</a:t>
+                      </a:r>
+                      <a:endParaRPr kumimoji="1" lang="ja-JP" altLang="en-US" dirty="0"/>
+                    </a:p>
+                  </a:txBody>
+                  <a:tcPr/>
+                </a:tc>
+                <a:tc>
+                  <a:txBody>
+                    <a:bodyPr/>
+                    <a:lstStyle/>
+                    <a:p>
+                      <a:r>
+                        <a:rPr kumimoji="1" lang="ja-JP" altLang="en-US" dirty="0"/>
+                        <a:t>ポーズ画面</a:t>
+                      </a:r>
                     </a:p>
                   </a:txBody>
                   <a:tcPr/>
